--- a/3DLv3/Plan/嘘情報× 仕様書.pptx
+++ b/3DLv3/Plan/嘘情報× 仕様書.pptx
@@ -5,7 +5,7 @@
     <p:sldMasterId id="2147483660" r:id="rId1"/>
   </p:sldMasterIdLst>
   <p:notesMasterIdLst>
-    <p:notesMasterId r:id="rId29"/>
+    <p:notesMasterId r:id="rId31"/>
   </p:notesMasterIdLst>
   <p:sldIdLst>
     <p:sldId id="264" r:id="rId2"/>
@@ -32,39 +32,41 @@
     <p:sldId id="293" r:id="rId23"/>
     <p:sldId id="292" r:id="rId24"/>
     <p:sldId id="295" r:id="rId25"/>
-    <p:sldId id="294" r:id="rId26"/>
-    <p:sldId id="291" r:id="rId27"/>
-    <p:sldId id="296" r:id="rId28"/>
+    <p:sldId id="297" r:id="rId26"/>
+    <p:sldId id="294" r:id="rId27"/>
+    <p:sldId id="291" r:id="rId28"/>
+    <p:sldId id="296" r:id="rId29"/>
+    <p:sldId id="298" r:id="rId30"/>
   </p:sldIdLst>
   <p:sldSz cx="9144000" cy="5143500" type="screen16x9"/>
   <p:notesSz cx="6858000" cy="9144000"/>
   <p:embeddedFontLst>
     <p:embeddedFont>
       <p:font typeface="Century Gothic" panose="020B0502020202020204" pitchFamily="34" charset="0"/>
-      <p:regular r:id="rId30"/>
-      <p:bold r:id="rId31"/>
-      <p:italic r:id="rId32"/>
-      <p:boldItalic r:id="rId33"/>
+      <p:regular r:id="rId32"/>
+      <p:bold r:id="rId33"/>
+      <p:italic r:id="rId34"/>
+      <p:boldItalic r:id="rId35"/>
     </p:embeddedFont>
     <p:embeddedFont>
       <p:font typeface="Old Standard TT" panose="020B0600070205080204" charset="0"/>
-      <p:regular r:id="rId34"/>
-      <p:bold r:id="rId35"/>
-      <p:italic r:id="rId36"/>
+      <p:regular r:id="rId36"/>
+      <p:bold r:id="rId37"/>
+      <p:italic r:id="rId38"/>
     </p:embeddedFont>
     <p:embeddedFont>
       <p:font typeface="メイリオ" panose="020B0604030504040204" pitchFamily="50" charset="-128"/>
-      <p:regular r:id="rId37"/>
-      <p:bold r:id="rId38"/>
-      <p:italic r:id="rId39"/>
-      <p:boldItalic r:id="rId40"/>
+      <p:regular r:id="rId39"/>
+      <p:bold r:id="rId40"/>
+      <p:italic r:id="rId41"/>
+      <p:boldItalic r:id="rId42"/>
     </p:embeddedFont>
     <p:embeddedFont>
       <p:font typeface="メイリオ" panose="020B0604030504040204" pitchFamily="50" charset="-128"/>
-      <p:regular r:id="rId37"/>
-      <p:bold r:id="rId38"/>
-      <p:italic r:id="rId39"/>
-      <p:boldItalic r:id="rId40"/>
+      <p:regular r:id="rId39"/>
+      <p:bold r:id="rId40"/>
+      <p:italic r:id="rId41"/>
+      <p:boldItalic r:id="rId42"/>
     </p:embeddedFont>
   </p:embeddedFontLst>
   <p:defaultTextStyle>
@@ -318,6 +320,71 @@
 <file path=ppt/changesInfos/changesInfo1.xml><?xml version="1.0" encoding="utf-8"?>
 <pc:chgInfo xmlns:a="http://schemas.openxmlformats.org/drawingml/2006/main" xmlns:r="http://schemas.openxmlformats.org/officeDocument/2006/relationships" xmlns:ac="http://schemas.microsoft.com/office/drawing/2013/main/command" xmlns:pc="http://schemas.microsoft.com/office/powerpoint/2013/main/command">
   <pc:docChgLst>
+    <pc:chgData name="悠梓 宮地" userId="babf6a0beaa2bc1b" providerId="LiveId" clId="{56723208-6544-43D8-A1F7-4C74CA1026BD}"/>
+    <pc:docChg chg="addSld delSld modSld">
+      <pc:chgData name="悠梓 宮地" userId="babf6a0beaa2bc1b" providerId="LiveId" clId="{56723208-6544-43D8-A1F7-4C74CA1026BD}" dt="2026-10-26T01:50:41.795" v="13"/>
+      <pc:docMkLst>
+        <pc:docMk/>
+      </pc:docMkLst>
+      <pc:sldChg chg="add del">
+        <pc:chgData name="悠梓 宮地" userId="babf6a0beaa2bc1b" providerId="LiveId" clId="{56723208-6544-43D8-A1F7-4C74CA1026BD}" dt="2026-10-26T01:50:01.247" v="8"/>
+        <pc:sldMkLst>
+          <pc:docMk/>
+          <pc:sldMk cId="4018651522" sldId="291"/>
+        </pc:sldMkLst>
+      </pc:sldChg>
+      <pc:sldChg chg="add del">
+        <pc:chgData name="悠梓 宮地" userId="babf6a0beaa2bc1b" providerId="LiveId" clId="{56723208-6544-43D8-A1F7-4C74CA1026BD}" dt="2026-10-26T01:50:29.603" v="12"/>
+        <pc:sldMkLst>
+          <pc:docMk/>
+          <pc:sldMk cId="3461159945" sldId="292"/>
+        </pc:sldMkLst>
+      </pc:sldChg>
+      <pc:sldChg chg="add del">
+        <pc:chgData name="悠梓 宮地" userId="babf6a0beaa2bc1b" providerId="LiveId" clId="{56723208-6544-43D8-A1F7-4C74CA1026BD}" dt="2026-10-26T01:50:41.795" v="13"/>
+        <pc:sldMkLst>
+          <pc:docMk/>
+          <pc:sldMk cId="562226022" sldId="293"/>
+        </pc:sldMkLst>
+      </pc:sldChg>
+      <pc:sldChg chg="add del">
+        <pc:chgData name="悠梓 宮地" userId="babf6a0beaa2bc1b" providerId="LiveId" clId="{56723208-6544-43D8-A1F7-4C74CA1026BD}" dt="2026-10-26T01:50:07.769" v="9"/>
+        <pc:sldMkLst>
+          <pc:docMk/>
+          <pc:sldMk cId="798944292" sldId="294"/>
+        </pc:sldMkLst>
+      </pc:sldChg>
+      <pc:sldChg chg="add del">
+        <pc:chgData name="悠梓 宮地" userId="babf6a0beaa2bc1b" providerId="LiveId" clId="{56723208-6544-43D8-A1F7-4C74CA1026BD}" dt="2026-10-26T01:50:23.136" v="11"/>
+        <pc:sldMkLst>
+          <pc:docMk/>
+          <pc:sldMk cId="394834863" sldId="295"/>
+        </pc:sldMkLst>
+      </pc:sldChg>
+      <pc:sldChg chg="add del">
+        <pc:chgData name="悠梓 宮地" userId="babf6a0beaa2bc1b" providerId="LiveId" clId="{56723208-6544-43D8-A1F7-4C74CA1026BD}" dt="2026-10-26T01:49:55.459" v="7"/>
+        <pc:sldMkLst>
+          <pc:docMk/>
+          <pc:sldMk cId="2633514343" sldId="296"/>
+        </pc:sldMkLst>
+      </pc:sldChg>
+      <pc:sldChg chg="add">
+        <pc:chgData name="悠梓 宮地" userId="babf6a0beaa2bc1b" providerId="LiveId" clId="{56723208-6544-43D8-A1F7-4C74CA1026BD}" dt="2026-10-26T01:50:14.483" v="10"/>
+        <pc:sldMkLst>
+          <pc:docMk/>
+          <pc:sldMk cId="4045150363" sldId="297"/>
+        </pc:sldMkLst>
+      </pc:sldChg>
+      <pc:sldChg chg="add">
+        <pc:chgData name="悠梓 宮地" userId="babf6a0beaa2bc1b" providerId="LiveId" clId="{56723208-6544-43D8-A1F7-4C74CA1026BD}" dt="2026-10-26T01:49:43.588" v="0"/>
+        <pc:sldMkLst>
+          <pc:docMk/>
+          <pc:sldMk cId="2949587927" sldId="298"/>
+        </pc:sldMkLst>
+      </pc:sldChg>
+    </pc:docChg>
+  </pc:docChgLst>
+  <pc:docChgLst>
     <pc:chgData name="悠梓 宮地" userId="babf6a0beaa2bc1b" providerId="LiveId" clId="{41A08744-8D3B-45CB-907A-10E9E9312977}"/>
     <pc:docChg chg="undo custSel addSld delSld modSld sldOrd">
       <pc:chgData name="悠梓 宮地" userId="babf6a0beaa2bc1b" providerId="LiveId" clId="{41A08744-8D3B-45CB-907A-10E9E9312977}" dt="2026-10-21T06:07:41.039" v="6209"/>
@@ -559,8 +626,8 @@
           </ac:spMkLst>
         </pc:spChg>
       </pc:sldChg>
-      <pc:sldChg chg="delSp modSp add mod">
-        <pc:chgData name="悠梓 宮地" userId="babf6a0beaa2bc1b" providerId="LiveId" clId="{41A08744-8D3B-45CB-907A-10E9E9312977}" dt="2026-10-13T06:03:20.001" v="2582" actId="14100"/>
+      <pc:sldChg chg="add del">
+        <pc:chgData name="悠梓 宮地" userId="babf6a0beaa2bc1b" providerId="LiveId" clId="{41A08744-8D3B-45CB-907A-10E9E9312977}" dt="2026-10-13T05:49:32.301" v="897" actId="47"/>
         <pc:sldMkLst>
           <pc:docMk/>
           <pc:sldMk cId="1450099215" sldId="276"/>
@@ -589,13 +656,6 @@
             <ac:picMk id="3" creationId="{9EAFBCDE-C09E-42E1-B18F-50283D7FDD39}"/>
           </ac:picMkLst>
         </pc:picChg>
-      </pc:sldChg>
-      <pc:sldChg chg="add del">
-        <pc:chgData name="悠梓 宮地" userId="babf6a0beaa2bc1b" providerId="LiveId" clId="{41A08744-8D3B-45CB-907A-10E9E9312977}" dt="2026-10-13T05:49:32.301" v="897" actId="47"/>
-        <pc:sldMkLst>
-          <pc:docMk/>
-          <pc:sldMk cId="1450099215" sldId="276"/>
-        </pc:sldMkLst>
       </pc:sldChg>
       <pc:sldChg chg="addSp delSp modSp add mod">
         <pc:chgData name="悠梓 宮地" userId="babf6a0beaa2bc1b" providerId="LiveId" clId="{41A08744-8D3B-45CB-907A-10E9E9312977}" dt="2026-10-13T06:48:06.532" v="3394" actId="20577"/>
@@ -3488,7 +3548,7 @@
     </p:spTree>
     <p:extLst>
       <p:ext uri="{BB962C8B-B14F-4D97-AF65-F5344CB8AC3E}">
-        <p14:creationId xmlns:p14="http://schemas.microsoft.com/office/powerpoint/2010/main" val="1014644941"/>
+        <p14:creationId xmlns:p14="http://schemas.microsoft.com/office/powerpoint/2010/main" val="3696351833"/>
       </p:ext>
     </p:extLst>
   </p:cSld>
@@ -3597,7 +3657,7 @@
     </p:spTree>
     <p:extLst>
       <p:ext uri="{BB962C8B-B14F-4D97-AF65-F5344CB8AC3E}">
-        <p14:creationId xmlns:p14="http://schemas.microsoft.com/office/powerpoint/2010/main" val="3589190583"/>
+        <p14:creationId xmlns:p14="http://schemas.microsoft.com/office/powerpoint/2010/main" val="1014644941"/>
       </p:ext>
     </p:extLst>
   </p:cSld>
@@ -3706,7 +3766,225 @@
     </p:spTree>
     <p:extLst>
       <p:ext uri="{BB962C8B-B14F-4D97-AF65-F5344CB8AC3E}">
+        <p14:creationId xmlns:p14="http://schemas.microsoft.com/office/powerpoint/2010/main" val="3589190583"/>
+      </p:ext>
+    </p:extLst>
+  </p:cSld>
+  <p:clrMapOvr>
+    <a:masterClrMapping/>
+  </p:clrMapOvr>
+</p:notes>
+</file>
+
+<file path=ppt/notesSlides/notesSlide28.xml><?xml version="1.0" encoding="utf-8"?>
+<p:notes xmlns:a="http://schemas.openxmlformats.org/drawingml/2006/main" xmlns:r="http://schemas.openxmlformats.org/officeDocument/2006/relationships" xmlns:p="http://schemas.openxmlformats.org/presentationml/2006/main" showMasterSp="0" showMasterPhAnim="0">
+  <p:cSld>
+    <p:spTree>
+      <p:nvGrpSpPr>
+        <p:cNvPr id="1" name="Shape 187"/>
+        <p:cNvGrpSpPr/>
+        <p:nvPr/>
+      </p:nvGrpSpPr>
+      <p:grpSpPr>
+        <a:xfrm>
+          <a:off x="0" y="0"/>
+          <a:ext cx="0" cy="0"/>
+          <a:chOff x="0" y="0"/>
+          <a:chExt cx="0" cy="0"/>
+        </a:xfrm>
+      </p:grpSpPr>
+      <p:sp>
+        <p:nvSpPr>
+          <p:cNvPr id="188" name="Google Shape;188;g3f661477c09_0_35:notes"/>
+          <p:cNvSpPr>
+            <a:spLocks noGrp="1" noRot="1" noChangeAspect="1"/>
+          </p:cNvSpPr>
+          <p:nvPr>
+            <p:ph type="sldImg" idx="2"/>
+          </p:nvPr>
+        </p:nvSpPr>
+        <p:spPr>
+          <a:xfrm>
+            <a:off x="381000" y="685800"/>
+            <a:ext cx="6096000" cy="3429000"/>
+          </a:xfrm>
+          <a:custGeom>
+            <a:avLst/>
+            <a:gdLst/>
+            <a:ahLst/>
+            <a:cxnLst/>
+            <a:rect l="l" t="t" r="r" b="b"/>
+            <a:pathLst>
+              <a:path w="120000" h="120000" extrusionOk="0">
+                <a:moveTo>
+                  <a:pt x="0" y="0"/>
+                </a:moveTo>
+                <a:lnTo>
+                  <a:pt x="120000" y="0"/>
+                </a:lnTo>
+                <a:lnTo>
+                  <a:pt x="120000" y="120000"/>
+                </a:lnTo>
+                <a:lnTo>
+                  <a:pt x="0" y="120000"/>
+                </a:lnTo>
+                <a:close/>
+              </a:path>
+            </a:pathLst>
+          </a:custGeom>
+        </p:spPr>
+      </p:sp>
+      <p:sp>
+        <p:nvSpPr>
+          <p:cNvPr id="189" name="Google Shape;189;g3f661477c09_0_35:notes"/>
+          <p:cNvSpPr txBox="1">
+            <a:spLocks noGrp="1"/>
+          </p:cNvSpPr>
+          <p:nvPr>
+            <p:ph type="body" idx="1"/>
+          </p:nvPr>
+        </p:nvSpPr>
+        <p:spPr>
+          <a:xfrm>
+            <a:off x="685800" y="4343400"/>
+            <a:ext cx="5486400" cy="4114800"/>
+          </a:xfrm>
+          <a:prstGeom prst="rect">
+            <a:avLst/>
+          </a:prstGeom>
+        </p:spPr>
+        <p:txBody>
+          <a:bodyPr spcFirstLastPara="1" wrap="square" lIns="91425" tIns="91425" rIns="91425" bIns="91425" anchor="t" anchorCtr="0">
+            <a:noAutofit/>
+          </a:bodyPr>
+          <a:lstStyle/>
+          <a:p>
+            <a:pPr marL="0" lvl="0" indent="0" algn="l" rtl="0">
+              <a:spcBef>
+                <a:spcPts val="0"/>
+              </a:spcBef>
+              <a:spcAft>
+                <a:spcPts val="0"/>
+              </a:spcAft>
+              <a:buNone/>
+            </a:pPr>
+            <a:endParaRPr/>
+          </a:p>
+        </p:txBody>
+      </p:sp>
+    </p:spTree>
+    <p:extLst>
+      <p:ext uri="{BB962C8B-B14F-4D97-AF65-F5344CB8AC3E}">
         <p14:creationId xmlns:p14="http://schemas.microsoft.com/office/powerpoint/2010/main" val="3781461180"/>
+      </p:ext>
+    </p:extLst>
+  </p:cSld>
+  <p:clrMapOvr>
+    <a:masterClrMapping/>
+  </p:clrMapOvr>
+</p:notes>
+</file>
+
+<file path=ppt/notesSlides/notesSlide29.xml><?xml version="1.0" encoding="utf-8"?>
+<p:notes xmlns:a="http://schemas.openxmlformats.org/drawingml/2006/main" xmlns:r="http://schemas.openxmlformats.org/officeDocument/2006/relationships" xmlns:p="http://schemas.openxmlformats.org/presentationml/2006/main" showMasterSp="0" showMasterPhAnim="0">
+  <p:cSld>
+    <p:spTree>
+      <p:nvGrpSpPr>
+        <p:cNvPr id="1" name="Shape 187"/>
+        <p:cNvGrpSpPr/>
+        <p:nvPr/>
+      </p:nvGrpSpPr>
+      <p:grpSpPr>
+        <a:xfrm>
+          <a:off x="0" y="0"/>
+          <a:ext cx="0" cy="0"/>
+          <a:chOff x="0" y="0"/>
+          <a:chExt cx="0" cy="0"/>
+        </a:xfrm>
+      </p:grpSpPr>
+      <p:sp>
+        <p:nvSpPr>
+          <p:cNvPr id="188" name="Google Shape;188;g3f661477c09_0_35:notes"/>
+          <p:cNvSpPr>
+            <a:spLocks noGrp="1" noRot="1" noChangeAspect="1"/>
+          </p:cNvSpPr>
+          <p:nvPr>
+            <p:ph type="sldImg" idx="2"/>
+          </p:nvPr>
+        </p:nvSpPr>
+        <p:spPr>
+          <a:xfrm>
+            <a:off x="381000" y="685800"/>
+            <a:ext cx="6096000" cy="3429000"/>
+          </a:xfrm>
+          <a:custGeom>
+            <a:avLst/>
+            <a:gdLst/>
+            <a:ahLst/>
+            <a:cxnLst/>
+            <a:rect l="l" t="t" r="r" b="b"/>
+            <a:pathLst>
+              <a:path w="120000" h="120000" extrusionOk="0">
+                <a:moveTo>
+                  <a:pt x="0" y="0"/>
+                </a:moveTo>
+                <a:lnTo>
+                  <a:pt x="120000" y="0"/>
+                </a:lnTo>
+                <a:lnTo>
+                  <a:pt x="120000" y="120000"/>
+                </a:lnTo>
+                <a:lnTo>
+                  <a:pt x="0" y="120000"/>
+                </a:lnTo>
+                <a:close/>
+              </a:path>
+            </a:pathLst>
+          </a:custGeom>
+        </p:spPr>
+      </p:sp>
+      <p:sp>
+        <p:nvSpPr>
+          <p:cNvPr id="189" name="Google Shape;189;g3f661477c09_0_35:notes"/>
+          <p:cNvSpPr txBox="1">
+            <a:spLocks noGrp="1"/>
+          </p:cNvSpPr>
+          <p:nvPr>
+            <p:ph type="body" idx="1"/>
+          </p:nvPr>
+        </p:nvSpPr>
+        <p:spPr>
+          <a:xfrm>
+            <a:off x="685800" y="4343400"/>
+            <a:ext cx="5486400" cy="4114800"/>
+          </a:xfrm>
+          <a:prstGeom prst="rect">
+            <a:avLst/>
+          </a:prstGeom>
+        </p:spPr>
+        <p:txBody>
+          <a:bodyPr spcFirstLastPara="1" wrap="square" lIns="91425" tIns="91425" rIns="91425" bIns="91425" anchor="t" anchorCtr="0">
+            <a:noAutofit/>
+          </a:bodyPr>
+          <a:lstStyle/>
+          <a:p>
+            <a:pPr marL="0" lvl="0" indent="0" algn="l" rtl="0">
+              <a:spcBef>
+                <a:spcPts val="0"/>
+              </a:spcBef>
+              <a:spcAft>
+                <a:spcPts val="0"/>
+              </a:spcAft>
+              <a:buNone/>
+            </a:pPr>
+            <a:endParaRPr/>
+          </a:p>
+        </p:txBody>
+      </p:sp>
+    </p:spTree>
+    <p:extLst>
+      <p:ext uri="{BB962C8B-B14F-4D97-AF65-F5344CB8AC3E}">
+        <p14:creationId xmlns:p14="http://schemas.microsoft.com/office/powerpoint/2010/main" val="2609489854"/>
       </p:ext>
     </p:extLst>
   </p:cSld>
@@ -14476,7 +14754,7 @@
                 <a:latin typeface="メイリオ" panose="020B0604030504040204" pitchFamily="50" charset="-128"/>
                 <a:ea typeface="メイリオ" panose="020B0604030504040204" pitchFamily="50" charset="-128"/>
               </a:rPr>
-              <a:t>政府提供資料：地震の発生と被害</a:t>
+              <a:t>政府提供資料：地震発生時の被害状況に関する資料</a:t>
             </a:r>
           </a:p>
           <a:p>
@@ -14705,7 +14983,7 @@
                 <a:latin typeface="メイリオ" panose="020B0604030504040204" pitchFamily="50" charset="-128"/>
                 <a:ea typeface="メイリオ" panose="020B0604030504040204" pitchFamily="50" charset="-128"/>
               </a:rPr>
-              <a:t>政府提供資料：水道水の安全性</a:t>
+              <a:t>政府提供資料：水道水の安全性に関する資料</a:t>
             </a:r>
           </a:p>
           <a:p>
@@ -14916,7 +15194,7 @@
                 <a:latin typeface="メイリオ" panose="020B0604030504040204" pitchFamily="50" charset="-128"/>
                 <a:ea typeface="メイリオ" panose="020B0604030504040204" pitchFamily="50" charset="-128"/>
               </a:rPr>
-              <a:t>政府提供資料：警察官を装った詐欺への注意喚起</a:t>
+              <a:t>政府提供資料：偽警察による詐欺への注意喚起</a:t>
             </a:r>
           </a:p>
           <a:p>
@@ -15029,7 +15307,7 @@
                 <a:cs typeface="Meiryo"/>
                 <a:sym typeface="Meiryo"/>
               </a:rPr>
-              <a:t>嘘情報チュートリアル</a:t>
+              <a:t>真情報③</a:t>
             </a:r>
             <a:endParaRPr dirty="0">
               <a:latin typeface="Meiryo"/>
@@ -15052,8 +15330,8 @@
         </p:nvSpPr>
         <p:spPr>
           <a:xfrm>
-            <a:off x="552150" y="1073125"/>
-            <a:ext cx="8469930" cy="3949980"/>
+            <a:off x="552150" y="1073124"/>
+            <a:ext cx="8469930" cy="3949979"/>
           </a:xfrm>
           <a:prstGeom prst="rect">
             <a:avLst/>
@@ -15069,18 +15347,25 @@
               <a:buNone/>
             </a:pPr>
             <a:r>
+              <a:rPr lang="ja-JP" altLang="en-US" dirty="0">
+                <a:latin typeface="メイリオ" panose="020B0604030504040204" pitchFamily="50" charset="-128"/>
+                <a:ea typeface="メイリオ" panose="020B0604030504040204" pitchFamily="50" charset="-128"/>
+              </a:rPr>
+              <a:t> </a:t>
+            </a:r>
+            <a:r>
               <a:rPr lang="en-US" altLang="ja-JP" dirty="0">
                 <a:latin typeface="メイリオ" panose="020B0604030504040204" pitchFamily="50" charset="-128"/>
                 <a:ea typeface="メイリオ" panose="020B0604030504040204" pitchFamily="50" charset="-128"/>
               </a:rPr>
-              <a:t>INFO000</a:t>
-            </a:r>
-            <a:r>
-              <a:rPr lang="ja-JP" altLang="en-US" dirty="0">
-                <a:latin typeface="メイリオ" panose="020B0604030504040204" pitchFamily="50" charset="-128"/>
-                <a:ea typeface="メイリオ" panose="020B0604030504040204" pitchFamily="50" charset="-128"/>
-              </a:rPr>
-              <a:t>：動物園の動物が脱走</a:t>
+              <a:t>FACT002</a:t>
+            </a:r>
+            <a:r>
+              <a:rPr lang="ja-JP" altLang="en-US" dirty="0">
+                <a:latin typeface="メイリオ" panose="020B0604030504040204" pitchFamily="50" charset="-128"/>
+                <a:ea typeface="メイリオ" panose="020B0604030504040204" pitchFamily="50" charset="-128"/>
+              </a:rPr>
+              <a:t>：投資を始める前に知っておきたいリスク</a:t>
             </a:r>
             <a:endParaRPr lang="en-US" altLang="ja-JP" dirty="0">
               <a:latin typeface="メイリオ" panose="020B0604030504040204" pitchFamily="50" charset="-128"/>
@@ -15096,7 +15381,19 @@
                 <a:latin typeface="メイリオ" panose="020B0604030504040204" pitchFamily="50" charset="-128"/>
                 <a:ea typeface="メイリオ" panose="020B0604030504040204" pitchFamily="50" charset="-128"/>
               </a:rPr>
-              <a:t>「今回の地震で動物園の動物がどんどん脱走してるよ！！みんな気をつけて！！」</a:t>
+              <a:t>「投資商品には、価格の変動などによって、購入した金額を下回る損失が発生するリスクがある。投資を行う際は、商品の特徴やリスクを理解したうえで判断することが重要である。」</a:t>
+            </a:r>
+          </a:p>
+          <a:p>
+            <a:pPr marL="158750" indent="0" algn="r">
+              <a:buNone/>
+            </a:pPr>
+            <a:r>
+              <a:rPr lang="ja-JP" altLang="en-US" dirty="0">
+                <a:latin typeface="メイリオ" panose="020B0604030504040204" pitchFamily="50" charset="-128"/>
+                <a:ea typeface="メイリオ" panose="020B0604030504040204" pitchFamily="50" charset="-128"/>
+              </a:rPr>
+              <a:t>投稿者：金融庁</a:t>
             </a:r>
             <a:endParaRPr lang="en-US" altLang="ja-JP" dirty="0">
               <a:latin typeface="メイリオ" panose="020B0604030504040204" pitchFamily="50" charset="-128"/>
@@ -15104,15 +15401,27 @@
             </a:endParaRPr>
           </a:p>
           <a:p>
-            <a:pPr marL="158750" indent="0" algn="r">
-              <a:buNone/>
-            </a:pPr>
-            <a:r>
-              <a:rPr lang="ja-JP" altLang="en-US" dirty="0">
-                <a:latin typeface="メイリオ" panose="020B0604030504040204" pitchFamily="50" charset="-128"/>
-                <a:ea typeface="メイリオ" panose="020B0604030504040204" pitchFamily="50" charset="-128"/>
-              </a:rPr>
-              <a:t>投稿者：猫犬大好き人間</a:t>
+            <a:pPr marL="158750" indent="0">
+              <a:buNone/>
+            </a:pPr>
+            <a:r>
+              <a:rPr lang="ja-JP" altLang="en-US" dirty="0">
+                <a:latin typeface="メイリオ" panose="020B0604030504040204" pitchFamily="50" charset="-128"/>
+                <a:ea typeface="メイリオ" panose="020B0604030504040204" pitchFamily="50" charset="-128"/>
+              </a:rPr>
+              <a:t>政府提供資料：投資に関する基本知識</a:t>
+            </a:r>
+          </a:p>
+          <a:p>
+            <a:pPr marL="158750" indent="0">
+              <a:buNone/>
+            </a:pPr>
+            <a:r>
+              <a:rPr lang="ja-JP" altLang="en-US" dirty="0">
+                <a:latin typeface="メイリオ" panose="020B0604030504040204" pitchFamily="50" charset="-128"/>
+                <a:ea typeface="メイリオ" panose="020B0604030504040204" pitchFamily="50" charset="-128"/>
+              </a:rPr>
+              <a:t>・株式や投資信託などの金融商品には、価格の変動などによって元本割れが発生するリスクがある。</a:t>
             </a:r>
             <a:endParaRPr lang="en-US" altLang="ja-JP" dirty="0">
               <a:latin typeface="メイリオ" panose="020B0604030504040204" pitchFamily="50" charset="-128"/>
@@ -15128,49 +15437,7 @@
                 <a:latin typeface="メイリオ" panose="020B0604030504040204" pitchFamily="50" charset="-128"/>
                 <a:ea typeface="メイリオ" panose="020B0604030504040204" pitchFamily="50" charset="-128"/>
               </a:rPr>
-              <a:t>政府提供資料：地震の発生と被害</a:t>
-            </a:r>
-          </a:p>
-          <a:p>
-            <a:pPr marL="158750" indent="0">
-              <a:buNone/>
-            </a:pPr>
-            <a:r>
-              <a:rPr lang="ja-JP" altLang="en-US" dirty="0">
-                <a:latin typeface="メイリオ" panose="020B0604030504040204" pitchFamily="50" charset="-128"/>
-                <a:ea typeface="メイリオ" panose="020B0604030504040204" pitchFamily="50" charset="-128"/>
-              </a:rPr>
-              <a:t>・マグニチュード</a:t>
-            </a:r>
-            <a:r>
-              <a:rPr lang="en-US" altLang="ja-JP" dirty="0">
-                <a:latin typeface="メイリオ" panose="020B0604030504040204" pitchFamily="50" charset="-128"/>
-                <a:ea typeface="メイリオ" panose="020B0604030504040204" pitchFamily="50" charset="-128"/>
-              </a:rPr>
-              <a:t>7</a:t>
-            </a:r>
-            <a:r>
-              <a:rPr lang="ja-JP" altLang="en-US" dirty="0">
-                <a:latin typeface="メイリオ" panose="020B0604030504040204" pitchFamily="50" charset="-128"/>
-                <a:ea typeface="メイリオ" panose="020B0604030504040204" pitchFamily="50" charset="-128"/>
-              </a:rPr>
-              <a:t>の地震が発生し、西日本の広い範囲で建物や道路などへの被害が報告されている。</a:t>
-            </a:r>
-            <a:endParaRPr lang="en-US" altLang="ja-JP" dirty="0">
-              <a:latin typeface="メイリオ" panose="020B0604030504040204" pitchFamily="50" charset="-128"/>
-              <a:ea typeface="メイリオ" panose="020B0604030504040204" pitchFamily="50" charset="-128"/>
-            </a:endParaRPr>
-          </a:p>
-          <a:p>
-            <a:pPr marL="158750" indent="0">
-              <a:buNone/>
-            </a:pPr>
-            <a:r>
-              <a:rPr lang="ja-JP" altLang="en-US" dirty="0">
-                <a:latin typeface="メイリオ" panose="020B0604030504040204" pitchFamily="50" charset="-128"/>
-                <a:ea typeface="メイリオ" panose="020B0604030504040204" pitchFamily="50" charset="-128"/>
-              </a:rPr>
-              <a:t>・現時点で、動物園や水族館から動物が脱走したという被害報告は確認されていない。</a:t>
+              <a:t>・投資を行う際は、商品の仕組みやリスクを理解した上で、自分自身で判断することが重要である。</a:t>
             </a:r>
           </a:p>
         </p:txBody>
@@ -15178,7 +15445,7 @@
     </p:spTree>
     <p:extLst>
       <p:ext uri="{BB962C8B-B14F-4D97-AF65-F5344CB8AC3E}">
-        <p14:creationId xmlns:p14="http://schemas.microsoft.com/office/powerpoint/2010/main" val="798944292"/>
+        <p14:creationId xmlns:p14="http://schemas.microsoft.com/office/powerpoint/2010/main" val="4045150363"/>
       </p:ext>
     </p:extLst>
   </p:cSld>
@@ -15255,7 +15522,7 @@
                 <a:cs typeface="Meiryo"/>
                 <a:sym typeface="Meiryo"/>
               </a:rPr>
-              <a:t>嘘情報①</a:t>
+              <a:t>嘘情報チュートリアル</a:t>
             </a:r>
             <a:endParaRPr dirty="0">
               <a:latin typeface="Meiryo"/>
@@ -15299,42 +15566,14 @@
                 <a:latin typeface="メイリオ" panose="020B0604030504040204" pitchFamily="50" charset="-128"/>
                 <a:ea typeface="メイリオ" panose="020B0604030504040204" pitchFamily="50" charset="-128"/>
               </a:rPr>
-              <a:t>INFO001</a:t>
-            </a:r>
-            <a:r>
-              <a:rPr lang="ja-JP" altLang="en-US" dirty="0">
-                <a:latin typeface="メイリオ" panose="020B0604030504040204" pitchFamily="50" charset="-128"/>
-                <a:ea typeface="メイリオ" panose="020B0604030504040204" pitchFamily="50" charset="-128"/>
-              </a:rPr>
-              <a:t>：</a:t>
-            </a:r>
-            <a:r>
-              <a:rPr lang="en-US" altLang="ja-JP" dirty="0">
-                <a:latin typeface="メイリオ" panose="020B0604030504040204" pitchFamily="50" charset="-128"/>
-                <a:ea typeface="メイリオ" panose="020B0604030504040204" pitchFamily="50" charset="-128"/>
-              </a:rPr>
-              <a:t>【</a:t>
-            </a:r>
-            <a:r>
-              <a:rPr lang="ja-JP" altLang="en-US" dirty="0">
-                <a:latin typeface="メイリオ" panose="020B0604030504040204" pitchFamily="50" charset="-128"/>
-                <a:ea typeface="メイリオ" panose="020B0604030504040204" pitchFamily="50" charset="-128"/>
-              </a:rPr>
-              <a:t>警告</a:t>
-            </a:r>
-            <a:r>
-              <a:rPr lang="en-US" altLang="ja-JP" dirty="0">
-                <a:latin typeface="メイリオ" panose="020B0604030504040204" pitchFamily="50" charset="-128"/>
-                <a:ea typeface="メイリオ" panose="020B0604030504040204" pitchFamily="50" charset="-128"/>
-              </a:rPr>
-              <a:t>】</a:t>
-            </a:r>
-            <a:r>
-              <a:rPr lang="ja-JP" altLang="en-US" dirty="0">
-                <a:latin typeface="メイリオ" panose="020B0604030504040204" pitchFamily="50" charset="-128"/>
-                <a:ea typeface="メイリオ" panose="020B0604030504040204" pitchFamily="50" charset="-128"/>
-              </a:rPr>
-              <a:t>水道水に未知の有害物質が混入？</a:t>
+              <a:t>INFO000</a:t>
+            </a:r>
+            <a:r>
+              <a:rPr lang="ja-JP" altLang="en-US" dirty="0">
+                <a:latin typeface="メイリオ" panose="020B0604030504040204" pitchFamily="50" charset="-128"/>
+                <a:ea typeface="メイリオ" panose="020B0604030504040204" pitchFamily="50" charset="-128"/>
+              </a:rPr>
+              <a:t>：動物園の動物が脱走</a:t>
             </a:r>
             <a:endParaRPr lang="en-US" altLang="ja-JP" dirty="0">
               <a:latin typeface="メイリオ" panose="020B0604030504040204" pitchFamily="50" charset="-128"/>
@@ -15350,7 +15589,7 @@
                 <a:latin typeface="メイリオ" panose="020B0604030504040204" pitchFamily="50" charset="-128"/>
                 <a:ea typeface="メイリオ" panose="020B0604030504040204" pitchFamily="50" charset="-128"/>
               </a:rPr>
-              <a:t>「ネット上で「ポリルエキリス」という有害物質が水道水に含まれているとの情報が拡散されています。この物質は人体に悪影響を及ぼすとされており、水道水の使用を控えるべきだという声が上がっています。」</a:t>
+              <a:t>「今回の地震で動物園の動物がどんどん脱走してるよ！！みんな気をつけて！！」</a:t>
             </a:r>
             <a:endParaRPr lang="en-US" altLang="ja-JP" dirty="0">
               <a:latin typeface="メイリオ" panose="020B0604030504040204" pitchFamily="50" charset="-128"/>
@@ -15366,7 +15605,7 @@
                 <a:latin typeface="メイリオ" panose="020B0604030504040204" pitchFamily="50" charset="-128"/>
                 <a:ea typeface="メイリオ" panose="020B0604030504040204" pitchFamily="50" charset="-128"/>
               </a:rPr>
-              <a:t>投稿者：水道の女神様</a:t>
+              <a:t>投稿者：猫犬大好き人間</a:t>
             </a:r>
             <a:endParaRPr lang="en-US" altLang="ja-JP" dirty="0">
               <a:latin typeface="メイリオ" panose="020B0604030504040204" pitchFamily="50" charset="-128"/>
@@ -15382,7 +15621,7 @@
                 <a:latin typeface="メイリオ" panose="020B0604030504040204" pitchFamily="50" charset="-128"/>
                 <a:ea typeface="メイリオ" panose="020B0604030504040204" pitchFamily="50" charset="-128"/>
               </a:rPr>
-              <a:t>政府提供資料：水道水の安全性</a:t>
+              <a:t>政府提供資料：地震発生時の被害状況に関する資料</a:t>
             </a:r>
           </a:p>
           <a:p>
@@ -15394,8 +15633,26 @@
                 <a:latin typeface="メイリオ" panose="020B0604030504040204" pitchFamily="50" charset="-128"/>
                 <a:ea typeface="メイリオ" panose="020B0604030504040204" pitchFamily="50" charset="-128"/>
               </a:rPr>
-              <a:t>・公的な化学物質情報を確認した結果、「ポリルエキリス」という名称の有害物質は確認されていない。</a:t>
-            </a:r>
+              <a:t>・マグニチュード</a:t>
+            </a:r>
+            <a:r>
+              <a:rPr lang="en-US" altLang="ja-JP" dirty="0">
+                <a:latin typeface="メイリオ" panose="020B0604030504040204" pitchFamily="50" charset="-128"/>
+                <a:ea typeface="メイリオ" panose="020B0604030504040204" pitchFamily="50" charset="-128"/>
+              </a:rPr>
+              <a:t>7</a:t>
+            </a:r>
+            <a:r>
+              <a:rPr lang="ja-JP" altLang="en-US" dirty="0">
+                <a:latin typeface="メイリオ" panose="020B0604030504040204" pitchFamily="50" charset="-128"/>
+                <a:ea typeface="メイリオ" panose="020B0604030504040204" pitchFamily="50" charset="-128"/>
+              </a:rPr>
+              <a:t>の地震が発生し、西日本の広い範囲で建物や道路などへの被害が報告されている。</a:t>
+            </a:r>
+            <a:endParaRPr lang="en-US" altLang="ja-JP" dirty="0">
+              <a:latin typeface="メイリオ" panose="020B0604030504040204" pitchFamily="50" charset="-128"/>
+              <a:ea typeface="メイリオ" panose="020B0604030504040204" pitchFamily="50" charset="-128"/>
+            </a:endParaRPr>
           </a:p>
           <a:p>
             <a:pPr marL="158750" indent="0">
@@ -15406,7 +15663,7 @@
                 <a:latin typeface="メイリオ" panose="020B0604030504040204" pitchFamily="50" charset="-128"/>
                 <a:ea typeface="メイリオ" panose="020B0604030504040204" pitchFamily="50" charset="-128"/>
               </a:rPr>
-              <a:t>・水道水の安全性については、自治体や水道事業者が公表する情報を確認すること。</a:t>
+              <a:t>・現時点で、動物園や水族館から動物が脱走したという被害報告は確認されていない。</a:t>
             </a:r>
           </a:p>
         </p:txBody>
@@ -15414,7 +15671,7 @@
     </p:spTree>
     <p:extLst>
       <p:ext uri="{BB962C8B-B14F-4D97-AF65-F5344CB8AC3E}">
-        <p14:creationId xmlns:p14="http://schemas.microsoft.com/office/powerpoint/2010/main" val="4018651522"/>
+        <p14:creationId xmlns:p14="http://schemas.microsoft.com/office/powerpoint/2010/main" val="798944292"/>
       </p:ext>
     </p:extLst>
   </p:cSld>
@@ -15491,7 +15748,7 @@
                 <a:cs typeface="Meiryo"/>
                 <a:sym typeface="Meiryo"/>
               </a:rPr>
-              <a:t>嘘情報②</a:t>
+              <a:t>嘘情報①</a:t>
             </a:r>
             <a:endParaRPr dirty="0">
               <a:latin typeface="Meiryo"/>
@@ -15535,14 +15792,42 @@
                 <a:latin typeface="メイリオ" panose="020B0604030504040204" pitchFamily="50" charset="-128"/>
                 <a:ea typeface="メイリオ" panose="020B0604030504040204" pitchFamily="50" charset="-128"/>
               </a:rPr>
-              <a:t>INFO002</a:t>
-            </a:r>
-            <a:r>
-              <a:rPr lang="ja-JP" altLang="en-US" dirty="0">
-                <a:latin typeface="メイリオ" panose="020B0604030504040204" pitchFamily="50" charset="-128"/>
-                <a:ea typeface="メイリオ" panose="020B0604030504040204" pitchFamily="50" charset="-128"/>
-              </a:rPr>
-              <a:t>：詐欺に便乗したデマ</a:t>
+              <a:t>INFO001</a:t>
+            </a:r>
+            <a:r>
+              <a:rPr lang="ja-JP" altLang="en-US" dirty="0">
+                <a:latin typeface="メイリオ" panose="020B0604030504040204" pitchFamily="50" charset="-128"/>
+                <a:ea typeface="メイリオ" panose="020B0604030504040204" pitchFamily="50" charset="-128"/>
+              </a:rPr>
+              <a:t>：</a:t>
+            </a:r>
+            <a:r>
+              <a:rPr lang="en-US" altLang="ja-JP" dirty="0">
+                <a:latin typeface="メイリオ" panose="020B0604030504040204" pitchFamily="50" charset="-128"/>
+                <a:ea typeface="メイリオ" panose="020B0604030504040204" pitchFamily="50" charset="-128"/>
+              </a:rPr>
+              <a:t>【</a:t>
+            </a:r>
+            <a:r>
+              <a:rPr lang="ja-JP" altLang="en-US" dirty="0">
+                <a:latin typeface="メイリオ" panose="020B0604030504040204" pitchFamily="50" charset="-128"/>
+                <a:ea typeface="メイリオ" panose="020B0604030504040204" pitchFamily="50" charset="-128"/>
+              </a:rPr>
+              <a:t>警告</a:t>
+            </a:r>
+            <a:r>
+              <a:rPr lang="en-US" altLang="ja-JP" dirty="0">
+                <a:latin typeface="メイリオ" panose="020B0604030504040204" pitchFamily="50" charset="-128"/>
+                <a:ea typeface="メイリオ" panose="020B0604030504040204" pitchFamily="50" charset="-128"/>
+              </a:rPr>
+              <a:t>】</a:t>
+            </a:r>
+            <a:r>
+              <a:rPr lang="ja-JP" altLang="en-US" dirty="0">
+                <a:latin typeface="メイリオ" panose="020B0604030504040204" pitchFamily="50" charset="-128"/>
+                <a:ea typeface="メイリオ" panose="020B0604030504040204" pitchFamily="50" charset="-128"/>
+              </a:rPr>
+              <a:t>水道水に未知の有害物質が混入？</a:t>
             </a:r>
             <a:endParaRPr lang="en-US" altLang="ja-JP" dirty="0">
               <a:latin typeface="メイリオ" panose="020B0604030504040204" pitchFamily="50" charset="-128"/>
@@ -15558,21 +15843,7 @@
                 <a:latin typeface="メイリオ" panose="020B0604030504040204" pitchFamily="50" charset="-128"/>
                 <a:ea typeface="メイリオ" panose="020B0604030504040204" pitchFamily="50" charset="-128"/>
               </a:rPr>
-              <a:t>「警察官を名乗る電話が来た場合、電話に出るだけで銀行口座の情報が盗まれるらしい。恐ろしいぜ</a:t>
-            </a:r>
-            <a:r>
-              <a:rPr lang="en-US" altLang="ja-JP" dirty="0">
-                <a:latin typeface="メイリオ" panose="020B0604030504040204" pitchFamily="50" charset="-128"/>
-                <a:ea typeface="メイリオ" panose="020B0604030504040204" pitchFamily="50" charset="-128"/>
-              </a:rPr>
-              <a:t>…</a:t>
-            </a:r>
-            <a:r>
-              <a:rPr lang="ja-JP" altLang="en-US" dirty="0">
-                <a:latin typeface="メイリオ" panose="020B0604030504040204" pitchFamily="50" charset="-128"/>
-                <a:ea typeface="メイリオ" panose="020B0604030504040204" pitchFamily="50" charset="-128"/>
-              </a:rPr>
-              <a:t>」</a:t>
+              <a:t>「ネット上で「ポリルエキリス」という有害物質が水道水に含まれているとの情報が拡散されています。この物質は人体に悪影響を及ぼすとされており、水道水の使用を控えるべきだという声が上がっています。」</a:t>
             </a:r>
             <a:endParaRPr lang="en-US" altLang="ja-JP" dirty="0">
               <a:latin typeface="メイリオ" panose="020B0604030504040204" pitchFamily="50" charset="-128"/>
@@ -15588,7 +15859,7 @@
                 <a:latin typeface="メイリオ" panose="020B0604030504040204" pitchFamily="50" charset="-128"/>
                 <a:ea typeface="メイリオ" panose="020B0604030504040204" pitchFamily="50" charset="-128"/>
               </a:rPr>
-              <a:t>投稿者：正義を貫く者</a:t>
+              <a:t>投稿者：水道の女神様</a:t>
             </a:r>
             <a:endParaRPr lang="en-US" altLang="ja-JP" dirty="0">
               <a:latin typeface="メイリオ" panose="020B0604030504040204" pitchFamily="50" charset="-128"/>
@@ -15604,7 +15875,229 @@
                 <a:latin typeface="メイリオ" panose="020B0604030504040204" pitchFamily="50" charset="-128"/>
                 <a:ea typeface="メイリオ" panose="020B0604030504040204" pitchFamily="50" charset="-128"/>
               </a:rPr>
-              <a:t>政府提供資料：警察官を装った詐欺への注意喚起</a:t>
+              <a:t>政府提供資料：水道水の安全性に関する資料</a:t>
+            </a:r>
+          </a:p>
+          <a:p>
+            <a:pPr marL="158750" indent="0">
+              <a:buNone/>
+            </a:pPr>
+            <a:r>
+              <a:rPr lang="ja-JP" altLang="en-US" dirty="0">
+                <a:latin typeface="メイリオ" panose="020B0604030504040204" pitchFamily="50" charset="-128"/>
+                <a:ea typeface="メイリオ" panose="020B0604030504040204" pitchFamily="50" charset="-128"/>
+              </a:rPr>
+              <a:t>・公的な化学物質情報を確認した結果、「ポリルエキリス」という名称の有害物質は確認されていない。</a:t>
+            </a:r>
+          </a:p>
+          <a:p>
+            <a:pPr marL="158750" indent="0">
+              <a:buNone/>
+            </a:pPr>
+            <a:r>
+              <a:rPr lang="ja-JP" altLang="en-US" dirty="0">
+                <a:latin typeface="メイリオ" panose="020B0604030504040204" pitchFamily="50" charset="-128"/>
+                <a:ea typeface="メイリオ" panose="020B0604030504040204" pitchFamily="50" charset="-128"/>
+              </a:rPr>
+              <a:t>・水道水の安全性については、自治体や水道事業者が公表する情報を確認すること。</a:t>
+            </a:r>
+          </a:p>
+        </p:txBody>
+      </p:sp>
+    </p:spTree>
+    <p:extLst>
+      <p:ext uri="{BB962C8B-B14F-4D97-AF65-F5344CB8AC3E}">
+        <p14:creationId xmlns:p14="http://schemas.microsoft.com/office/powerpoint/2010/main" val="4018651522"/>
+      </p:ext>
+    </p:extLst>
+  </p:cSld>
+  <p:clrMapOvr>
+    <a:masterClrMapping/>
+  </p:clrMapOvr>
+</p:sld>
+</file>
+
+<file path=ppt/slides/slide28.xml><?xml version="1.0" encoding="utf-8"?>
+<p:sld xmlns:a="http://schemas.openxmlformats.org/drawingml/2006/main" xmlns:r="http://schemas.openxmlformats.org/officeDocument/2006/relationships" xmlns:p="http://schemas.openxmlformats.org/presentationml/2006/main">
+  <p:cSld>
+    <p:spTree>
+      <p:nvGrpSpPr>
+        <p:cNvPr id="1" name="Shape 190"/>
+        <p:cNvGrpSpPr/>
+        <p:nvPr/>
+      </p:nvGrpSpPr>
+      <p:grpSpPr>
+        <a:xfrm>
+          <a:off x="0" y="0"/>
+          <a:ext cx="0" cy="0"/>
+          <a:chOff x="0" y="0"/>
+          <a:chExt cx="0" cy="0"/>
+        </a:xfrm>
+      </p:grpSpPr>
+      <p:sp>
+        <p:nvSpPr>
+          <p:cNvPr id="191" name="Google Shape;191;p33"/>
+          <p:cNvSpPr txBox="1">
+            <a:spLocks noGrp="1"/>
+          </p:cNvSpPr>
+          <p:nvPr>
+            <p:ph type="title"/>
+          </p:nvPr>
+        </p:nvSpPr>
+        <p:spPr>
+          <a:xfrm>
+            <a:off x="484566" y="339550"/>
+            <a:ext cx="6787500" cy="637500"/>
+          </a:xfrm>
+          <a:prstGeom prst="rect">
+            <a:avLst/>
+          </a:prstGeom>
+        </p:spPr>
+        <p:txBody>
+          <a:bodyPr spcFirstLastPara="1" wrap="square" lIns="68575" tIns="34275" rIns="68575" bIns="34275" anchor="t" anchorCtr="0">
+            <a:noAutofit/>
+          </a:bodyPr>
+          <a:lstStyle/>
+          <a:p>
+            <a:pPr marL="0" lvl="0" indent="0" algn="l" rtl="0">
+              <a:spcBef>
+                <a:spcPts val="0"/>
+              </a:spcBef>
+              <a:spcAft>
+                <a:spcPts val="0"/>
+              </a:spcAft>
+              <a:buNone/>
+            </a:pPr>
+            <a:r>
+              <a:rPr lang="ja" dirty="0">
+                <a:latin typeface="Meiryo"/>
+                <a:ea typeface="Meiryo"/>
+                <a:cs typeface="Meiryo"/>
+                <a:sym typeface="Meiryo"/>
+              </a:rPr>
+              <a:t>・</a:t>
+            </a:r>
+            <a:r>
+              <a:rPr lang="ja-JP" altLang="en-US" dirty="0">
+                <a:latin typeface="Meiryo"/>
+                <a:ea typeface="Meiryo"/>
+                <a:cs typeface="Meiryo"/>
+                <a:sym typeface="Meiryo"/>
+              </a:rPr>
+              <a:t>嘘情報②</a:t>
+            </a:r>
+            <a:endParaRPr dirty="0">
+              <a:latin typeface="Meiryo"/>
+              <a:ea typeface="Meiryo"/>
+              <a:cs typeface="Meiryo"/>
+              <a:sym typeface="Meiryo"/>
+            </a:endParaRPr>
+          </a:p>
+        </p:txBody>
+      </p:sp>
+      <p:sp>
+        <p:nvSpPr>
+          <p:cNvPr id="192" name="Google Shape;192;p33"/>
+          <p:cNvSpPr txBox="1">
+            <a:spLocks noGrp="1"/>
+          </p:cNvSpPr>
+          <p:nvPr>
+            <p:ph type="body" idx="1"/>
+          </p:nvPr>
+        </p:nvSpPr>
+        <p:spPr>
+          <a:xfrm>
+            <a:off x="552150" y="1073125"/>
+            <a:ext cx="8469930" cy="3949980"/>
+          </a:xfrm>
+          <a:prstGeom prst="rect">
+            <a:avLst/>
+          </a:prstGeom>
+        </p:spPr>
+        <p:txBody>
+          <a:bodyPr spcFirstLastPara="1" wrap="square" lIns="68575" tIns="34275" rIns="68575" bIns="34275" anchor="t" anchorCtr="0">
+            <a:noAutofit/>
+          </a:bodyPr>
+          <a:lstStyle/>
+          <a:p>
+            <a:pPr marL="158750" indent="0">
+              <a:buNone/>
+            </a:pPr>
+            <a:r>
+              <a:rPr lang="en-US" altLang="ja-JP" dirty="0">
+                <a:latin typeface="メイリオ" panose="020B0604030504040204" pitchFamily="50" charset="-128"/>
+                <a:ea typeface="メイリオ" panose="020B0604030504040204" pitchFamily="50" charset="-128"/>
+              </a:rPr>
+              <a:t>INFO002</a:t>
+            </a:r>
+            <a:r>
+              <a:rPr lang="ja-JP" altLang="en-US" dirty="0">
+                <a:latin typeface="メイリオ" panose="020B0604030504040204" pitchFamily="50" charset="-128"/>
+                <a:ea typeface="メイリオ" panose="020B0604030504040204" pitchFamily="50" charset="-128"/>
+              </a:rPr>
+              <a:t>：詐欺に便乗したデマ</a:t>
+            </a:r>
+            <a:endParaRPr lang="en-US" altLang="ja-JP" dirty="0">
+              <a:latin typeface="メイリオ" panose="020B0604030504040204" pitchFamily="50" charset="-128"/>
+              <a:ea typeface="メイリオ" panose="020B0604030504040204" pitchFamily="50" charset="-128"/>
+            </a:endParaRPr>
+          </a:p>
+          <a:p>
+            <a:pPr marL="158750" indent="0">
+              <a:buNone/>
+            </a:pPr>
+            <a:r>
+              <a:rPr lang="ja-JP" altLang="en-US" dirty="0">
+                <a:latin typeface="メイリオ" panose="020B0604030504040204" pitchFamily="50" charset="-128"/>
+                <a:ea typeface="メイリオ" panose="020B0604030504040204" pitchFamily="50" charset="-128"/>
+              </a:rPr>
+              <a:t>「警察官を名乗る電話が来た場合、電話に出るだけで銀行口座の情報が盗まれるらしい。恐ろしいぜ</a:t>
+            </a:r>
+            <a:r>
+              <a:rPr lang="en-US" altLang="ja-JP" dirty="0">
+                <a:latin typeface="メイリオ" panose="020B0604030504040204" pitchFamily="50" charset="-128"/>
+                <a:ea typeface="メイリオ" panose="020B0604030504040204" pitchFamily="50" charset="-128"/>
+              </a:rPr>
+              <a:t>…</a:t>
+            </a:r>
+            <a:r>
+              <a:rPr lang="ja-JP" altLang="en-US" dirty="0">
+                <a:latin typeface="メイリオ" panose="020B0604030504040204" pitchFamily="50" charset="-128"/>
+                <a:ea typeface="メイリオ" panose="020B0604030504040204" pitchFamily="50" charset="-128"/>
+              </a:rPr>
+              <a:t>」</a:t>
+            </a:r>
+            <a:endParaRPr lang="en-US" altLang="ja-JP" dirty="0">
+              <a:latin typeface="メイリオ" panose="020B0604030504040204" pitchFamily="50" charset="-128"/>
+              <a:ea typeface="メイリオ" panose="020B0604030504040204" pitchFamily="50" charset="-128"/>
+            </a:endParaRPr>
+          </a:p>
+          <a:p>
+            <a:pPr marL="158750" indent="0" algn="r">
+              <a:buNone/>
+            </a:pPr>
+            <a:r>
+              <a:rPr lang="ja-JP" altLang="en-US" dirty="0">
+                <a:latin typeface="メイリオ" panose="020B0604030504040204" pitchFamily="50" charset="-128"/>
+                <a:ea typeface="メイリオ" panose="020B0604030504040204" pitchFamily="50" charset="-128"/>
+              </a:rPr>
+              <a:t>投稿者：正義を貫く者</a:t>
+            </a:r>
+            <a:endParaRPr lang="en-US" altLang="ja-JP" dirty="0">
+              <a:latin typeface="メイリオ" panose="020B0604030504040204" pitchFamily="50" charset="-128"/>
+              <a:ea typeface="メイリオ" panose="020B0604030504040204" pitchFamily="50" charset="-128"/>
+            </a:endParaRPr>
+          </a:p>
+          <a:p>
+            <a:pPr marL="158750" indent="0">
+              <a:buNone/>
+            </a:pPr>
+            <a:r>
+              <a:rPr lang="ja-JP" altLang="en-US" dirty="0">
+                <a:latin typeface="メイリオ" panose="020B0604030504040204" pitchFamily="50" charset="-128"/>
+                <a:ea typeface="メイリオ" panose="020B0604030504040204" pitchFamily="50" charset="-128"/>
+              </a:rPr>
+              <a:t>政府提供資料：偽警察による詐欺への注意喚起</a:t>
             </a:r>
           </a:p>
           <a:p>
@@ -15641,6 +16134,218 @@
     <p:extLst>
       <p:ext uri="{BB962C8B-B14F-4D97-AF65-F5344CB8AC3E}">
         <p14:creationId xmlns:p14="http://schemas.microsoft.com/office/powerpoint/2010/main" val="2633514343"/>
+      </p:ext>
+    </p:extLst>
+  </p:cSld>
+  <p:clrMapOvr>
+    <a:masterClrMapping/>
+  </p:clrMapOvr>
+</p:sld>
+</file>
+
+<file path=ppt/slides/slide29.xml><?xml version="1.0" encoding="utf-8"?>
+<p:sld xmlns:a="http://schemas.openxmlformats.org/drawingml/2006/main" xmlns:r="http://schemas.openxmlformats.org/officeDocument/2006/relationships" xmlns:p="http://schemas.openxmlformats.org/presentationml/2006/main">
+  <p:cSld>
+    <p:spTree>
+      <p:nvGrpSpPr>
+        <p:cNvPr id="1" name="Shape 190"/>
+        <p:cNvGrpSpPr/>
+        <p:nvPr/>
+      </p:nvGrpSpPr>
+      <p:grpSpPr>
+        <a:xfrm>
+          <a:off x="0" y="0"/>
+          <a:ext cx="0" cy="0"/>
+          <a:chOff x="0" y="0"/>
+          <a:chExt cx="0" cy="0"/>
+        </a:xfrm>
+      </p:grpSpPr>
+      <p:sp>
+        <p:nvSpPr>
+          <p:cNvPr id="191" name="Google Shape;191;p33"/>
+          <p:cNvSpPr txBox="1">
+            <a:spLocks noGrp="1"/>
+          </p:cNvSpPr>
+          <p:nvPr>
+            <p:ph type="title"/>
+          </p:nvPr>
+        </p:nvSpPr>
+        <p:spPr>
+          <a:xfrm>
+            <a:off x="484566" y="339550"/>
+            <a:ext cx="6787500" cy="637500"/>
+          </a:xfrm>
+          <a:prstGeom prst="rect">
+            <a:avLst/>
+          </a:prstGeom>
+        </p:spPr>
+        <p:txBody>
+          <a:bodyPr spcFirstLastPara="1" wrap="square" lIns="68575" tIns="34275" rIns="68575" bIns="34275" anchor="t" anchorCtr="0">
+            <a:noAutofit/>
+          </a:bodyPr>
+          <a:lstStyle/>
+          <a:p>
+            <a:pPr marL="0" lvl="0" indent="0" algn="l" rtl="0">
+              <a:spcBef>
+                <a:spcPts val="0"/>
+              </a:spcBef>
+              <a:spcAft>
+                <a:spcPts val="0"/>
+              </a:spcAft>
+              <a:buNone/>
+            </a:pPr>
+            <a:r>
+              <a:rPr lang="ja" dirty="0">
+                <a:latin typeface="Meiryo"/>
+                <a:ea typeface="Meiryo"/>
+                <a:cs typeface="Meiryo"/>
+                <a:sym typeface="Meiryo"/>
+              </a:rPr>
+              <a:t>・</a:t>
+            </a:r>
+            <a:r>
+              <a:rPr lang="ja-JP" altLang="en-US" dirty="0">
+                <a:latin typeface="Meiryo"/>
+                <a:ea typeface="Meiryo"/>
+                <a:cs typeface="Meiryo"/>
+                <a:sym typeface="Meiryo"/>
+              </a:rPr>
+              <a:t>嘘情報③</a:t>
+            </a:r>
+            <a:endParaRPr dirty="0">
+              <a:latin typeface="Meiryo"/>
+              <a:ea typeface="Meiryo"/>
+              <a:cs typeface="Meiryo"/>
+              <a:sym typeface="Meiryo"/>
+            </a:endParaRPr>
+          </a:p>
+        </p:txBody>
+      </p:sp>
+      <p:sp>
+        <p:nvSpPr>
+          <p:cNvPr id="192" name="Google Shape;192;p33"/>
+          <p:cNvSpPr txBox="1">
+            <a:spLocks noGrp="1"/>
+          </p:cNvSpPr>
+          <p:nvPr>
+            <p:ph type="body" idx="1"/>
+          </p:nvPr>
+        </p:nvSpPr>
+        <p:spPr>
+          <a:xfrm>
+            <a:off x="552150" y="1073125"/>
+            <a:ext cx="8469930" cy="3949980"/>
+          </a:xfrm>
+          <a:prstGeom prst="rect">
+            <a:avLst/>
+          </a:prstGeom>
+        </p:spPr>
+        <p:txBody>
+          <a:bodyPr spcFirstLastPara="1" wrap="square" lIns="68575" tIns="34275" rIns="68575" bIns="34275" anchor="t" anchorCtr="0">
+            <a:noAutofit/>
+          </a:bodyPr>
+          <a:lstStyle/>
+          <a:p>
+            <a:pPr marL="158750" indent="0">
+              <a:buNone/>
+            </a:pPr>
+            <a:r>
+              <a:rPr lang="en-US" altLang="ja-JP" dirty="0">
+                <a:latin typeface="メイリオ" panose="020B0604030504040204" pitchFamily="50" charset="-128"/>
+                <a:ea typeface="メイリオ" panose="020B0604030504040204" pitchFamily="50" charset="-128"/>
+              </a:rPr>
+              <a:t>INFO002</a:t>
+            </a:r>
+            <a:r>
+              <a:rPr lang="ja-JP" altLang="en-US" dirty="0">
+                <a:latin typeface="メイリオ" panose="020B0604030504040204" pitchFamily="50" charset="-128"/>
+                <a:ea typeface="メイリオ" panose="020B0604030504040204" pitchFamily="50" charset="-128"/>
+              </a:rPr>
+              <a:t>：新しい投資制度なら損をする心配なし？</a:t>
+            </a:r>
+            <a:endParaRPr lang="en-US" altLang="ja-JP" dirty="0">
+              <a:latin typeface="メイリオ" panose="020B0604030504040204" pitchFamily="50" charset="-128"/>
+              <a:ea typeface="メイリオ" panose="020B0604030504040204" pitchFamily="50" charset="-128"/>
+            </a:endParaRPr>
+          </a:p>
+          <a:p>
+            <a:pPr marL="158750" indent="0">
+              <a:buNone/>
+            </a:pPr>
+            <a:r>
+              <a:rPr lang="ja-JP" altLang="en-US" dirty="0">
+                <a:latin typeface="メイリオ" panose="020B0604030504040204" pitchFamily="50" charset="-128"/>
+                <a:ea typeface="メイリオ" panose="020B0604030504040204" pitchFamily="50" charset="-128"/>
+              </a:rPr>
+              <a:t>「新しい投資制度では、国が損失を補償してくれるため、どのような金融商品を購入しても元本割れすることはないそうです。 」</a:t>
+            </a:r>
+            <a:endParaRPr lang="en-US" altLang="ja-JP" dirty="0">
+              <a:latin typeface="メイリオ" panose="020B0604030504040204" pitchFamily="50" charset="-128"/>
+              <a:ea typeface="メイリオ" panose="020B0604030504040204" pitchFamily="50" charset="-128"/>
+            </a:endParaRPr>
+          </a:p>
+          <a:p>
+            <a:pPr marL="158750" indent="0" algn="r">
+              <a:buNone/>
+            </a:pPr>
+            <a:r>
+              <a:rPr lang="ja-JP" altLang="en-US" dirty="0">
+                <a:latin typeface="メイリオ" panose="020B0604030504040204" pitchFamily="50" charset="-128"/>
+                <a:ea typeface="メイリオ" panose="020B0604030504040204" pitchFamily="50" charset="-128"/>
+              </a:rPr>
+              <a:t>投稿者：とあるサラリーマン</a:t>
+            </a:r>
+            <a:endParaRPr lang="en-US" altLang="ja-JP" dirty="0">
+              <a:latin typeface="メイリオ" panose="020B0604030504040204" pitchFamily="50" charset="-128"/>
+              <a:ea typeface="メイリオ" panose="020B0604030504040204" pitchFamily="50" charset="-128"/>
+            </a:endParaRPr>
+          </a:p>
+          <a:p>
+            <a:pPr marL="158750" indent="0">
+              <a:buNone/>
+            </a:pPr>
+            <a:r>
+              <a:rPr lang="ja-JP" altLang="en-US" dirty="0">
+                <a:latin typeface="メイリオ" panose="020B0604030504040204" pitchFamily="50" charset="-128"/>
+                <a:ea typeface="メイリオ" panose="020B0604030504040204" pitchFamily="50" charset="-128"/>
+              </a:rPr>
+              <a:t>政府提供資料：投資に関する基本知識</a:t>
+            </a:r>
+          </a:p>
+          <a:p>
+            <a:pPr marL="158750" indent="0">
+              <a:buNone/>
+            </a:pPr>
+            <a:r>
+              <a:rPr lang="ja-JP" altLang="en-US" dirty="0">
+                <a:latin typeface="メイリオ" panose="020B0604030504040204" pitchFamily="50" charset="-128"/>
+                <a:ea typeface="メイリオ" panose="020B0604030504040204" pitchFamily="50" charset="-128"/>
+              </a:rPr>
+              <a:t>・株式や投資信託などの金融商品には、価格の変動などによって元本割れが発生するリスクがある。</a:t>
+            </a:r>
+            <a:endParaRPr lang="en-US" altLang="ja-JP" dirty="0">
+              <a:latin typeface="メイリオ" panose="020B0604030504040204" pitchFamily="50" charset="-128"/>
+              <a:ea typeface="メイリオ" panose="020B0604030504040204" pitchFamily="50" charset="-128"/>
+            </a:endParaRPr>
+          </a:p>
+          <a:p>
+            <a:pPr marL="158750" indent="0">
+              <a:buNone/>
+            </a:pPr>
+            <a:r>
+              <a:rPr lang="ja-JP" altLang="en-US" dirty="0">
+                <a:latin typeface="メイリオ" panose="020B0604030504040204" pitchFamily="50" charset="-128"/>
+                <a:ea typeface="メイリオ" panose="020B0604030504040204" pitchFamily="50" charset="-128"/>
+              </a:rPr>
+              <a:t>・投資を行う際は、商品の仕組みやリスクを理解した上で、自分自身で判断することが重要である。</a:t>
+            </a:r>
+          </a:p>
+        </p:txBody>
+      </p:sp>
+    </p:spTree>
+    <p:extLst>
+      <p:ext uri="{BB962C8B-B14F-4D97-AF65-F5344CB8AC3E}">
+        <p14:creationId xmlns:p14="http://schemas.microsoft.com/office/powerpoint/2010/main" val="2949587927"/>
       </p:ext>
     </p:extLst>
   </p:cSld>
